--- a/prezentacie/t08w.pptx
+++ b/prezentacie/t08w.pptx
@@ -7864,7 +7864,7 @@
             </a:pPr>
             <a:r>
               <a:rPr lang="sk-SK" dirty="0"/>
-              <a:t>Ak nemáme napísaný žiaden konštruktor, Java automaticky vygeneruje </a:t>
+              <a:t>Ak nemáme napísaný žiadny konštruktor, Java automaticky vygeneruje </a:t>
             </a:r>
             <a:r>
               <a:rPr lang="sk-SK" dirty="0" err="1"/>
